--- a/我会永远陪着你-插件介绍.pptx
+++ b/我会永远陪着你-插件介绍.pptx
@@ -5447,7 +5447,7 @@
                 <a:ea typeface="Noto Sans SC"/>
                 <a:cs typeface="Noto Sans SC"/>
               </a:rPr>
-              <a:t>ASTRBOT PLUGIN · V6.0.2</a:t>
+              <a:t>ASTRBOT PLUGIN · V6.0.3</a:t>
             </a:r>
           </a:p>
         </p:txBody>
